--- a/cs701/slides/week-02.pptx
+++ b/cs701/slides/week-02.pptx
@@ -5430,7 +5430,7 @@
                   <a:srgbClr val="01AEFD"/>
                 </a:solidFill>
               </a:rPr>
-              <a:t>Type this into HoursInWeek.java   -   line 1</a:t>
+              <a:t>Make a new file, HoursInWeek.java, and type this in   -   line 1</a:t>
             </a:r>
           </a:p>
         </p:txBody>
@@ -5511,7 +5511,7 @@
                   <a:srgbClr val="DCECEF"/>
                 </a:solidFill>
               </a:rPr>
-              <a:t>Opens the class. Its name must be the file's name without .java - HoursInWeek lives in HoursInWeek.java - and every other line goes inside its braces.</a:t>
+              <a:t>Opens the class: HoursInWeek, the file's name without .java.</a:t>
             </a:r>
           </a:p>
         </p:txBody>
@@ -7247,7 +7247,7 @@
                   <a:srgbClr val="01AEFD"/>
                 </a:solidFill>
               </a:rPr>
-              <a:t>Type this into MysteryNumber.java   -   line 1</a:t>
+              <a:t>Make a new file, MysteryNumber.java, and type this in   -   line 1</a:t>
             </a:r>
           </a:p>
         </p:txBody>
@@ -7328,7 +7328,7 @@
                   <a:srgbClr val="DCECEF"/>
                 </a:solidFill>
               </a:rPr>
-              <a:t>Opens the class. Its name must be the file's name without .java - MysteryNumber lives in MysteryNumber.java - and every other line goes inside its braces.</a:t>
+              <a:t>Opens the class: MysteryNumber, the file's name without .java.</a:t>
             </a:r>
           </a:p>
         </p:txBody>
@@ -7387,7 +7387,7 @@
                   <a:srgbClr val="01AEFD"/>
                 </a:solidFill>
               </a:rPr>
-              <a:t>Type this into HoursInDay.java   -   line 1</a:t>
+              <a:t>Make a new file, HoursInDay.java, and type this in   -   line 1</a:t>
             </a:r>
           </a:p>
         </p:txBody>
@@ -7468,7 +7468,7 @@
                   <a:srgbClr val="DCECEF"/>
                 </a:solidFill>
               </a:rPr>
-              <a:t>Opens the class. Its name must be the file's name without .java - HoursInDay lives in HoursInDay.java - and every other line goes inside its braces.</a:t>
+              <a:t>Opens the class: HoursInDay, the file's name without .java.</a:t>
             </a:r>
           </a:p>
         </p:txBody>
@@ -8489,7 +8489,7 @@
                   <a:srgbClr val="01AEFD"/>
                 </a:solidFill>
               </a:rPr>
-              <a:t>Type this into Counter.java   -   line 1</a:t>
+              <a:t>Make a new file, Counter.java, and type this in   -   line 1</a:t>
             </a:r>
           </a:p>
         </p:txBody>
@@ -8570,7 +8570,7 @@
                   <a:srgbClr val="DCECEF"/>
                 </a:solidFill>
               </a:rPr>
-              <a:t>Opens the class. Its name must be the file's name without .java - Counter lives in Counter.java - and every other line goes inside its braces.</a:t>
+              <a:t>Opens the class: Counter, the file's name without .java.</a:t>
             </a:r>
           </a:p>
         </p:txBody>
